--- a/reports/Professional_Industry_Defense_Deck.pptx
+++ b/reports/Professional_Industry_Defense_Deck.pptx
@@ -143,7 +143,7 @@
       </p:grpSpPr>
       <p:sp>
         <p:nvSpPr>
-          <p:cNvPr id="2" name="Header Placeholder 1"/>
+          <p:cNvPr id="637902756" name="Header Placeholder 1"/>
           <p:cNvSpPr>
             <a:spLocks noGrp="1"/>
           </p:cNvSpPr>
@@ -177,7 +177,7 @@
       </p:sp>
       <p:sp>
         <p:nvSpPr>
-          <p:cNvPr id="3" name="Date Placeholder 2"/>
+          <p:cNvPr id="1329526516" name="Date Placeholder 2"/>
           <p:cNvSpPr>
             <a:spLocks noGrp="1"/>
           </p:cNvSpPr>
@@ -211,7 +211,7 @@
       </p:sp>
       <p:sp>
         <p:nvSpPr>
-          <p:cNvPr id="3" name="Date Placeholder 2"/>
+          <p:cNvPr id="1800277696" name="Date Placeholder 2"/>
           <p:cNvSpPr>
             <a:spLocks noGrp="1"/>
           </p:cNvSpPr>
@@ -245,7 +245,7 @@
       </p:sp>
       <p:sp>
         <p:nvSpPr>
-          <p:cNvPr id="5" name="Notes Placeholder 4"/>
+          <p:cNvPr id="1046795748" name="Notes Placeholder 4"/>
           <p:cNvSpPr>
             <a:spLocks noGrp="1"/>
           </p:cNvSpPr>
@@ -275,7 +275,7 @@
       </p:sp>
       <p:sp>
         <p:nvSpPr>
-          <p:cNvPr id="6" name="Footer Placeholder 5"/>
+          <p:cNvPr id="742566959" name="Footer Placeholder 5"/>
           <p:cNvSpPr>
             <a:spLocks noGrp="1"/>
           </p:cNvSpPr>
@@ -309,7 +309,7 @@
       </p:sp>
       <p:sp>
         <p:nvSpPr>
-          <p:cNvPr id="7" name="Slide Number Placeholder 6"/>
+          <p:cNvPr id="14741618" name="Slide Number Placeholder 6"/>
           <p:cNvSpPr>
             <a:spLocks noGrp="1"/>
           </p:cNvSpPr>
@@ -458,7 +458,7 @@
       </p:grpSpPr>
       <p:sp>
         <p:nvSpPr>
-          <p:cNvPr id="2" name="Slide Image Placeholder 1"/>
+          <p:cNvPr id="1266162297" name="Slide Image Placeholder 1"/>
           <p:cNvSpPr>
             <a:spLocks noChangeAspect="1" noGrp="1" noRot="1"/>
           </p:cNvSpPr>
@@ -470,7 +470,7 @@
       </p:sp>
       <p:sp>
         <p:nvSpPr>
-          <p:cNvPr id="3" name="Notes Placeholder 2"/>
+          <p:cNvPr id="1277504971" name="Notes Placeholder 2"/>
           <p:cNvSpPr>
             <a:spLocks noGrp="1"/>
           </p:cNvSpPr>
@@ -492,7 +492,7 @@
       </p:sp>
       <p:sp>
         <p:nvSpPr>
-          <p:cNvPr id="4" name="Slide Number Placeholder 3"/>
+          <p:cNvPr id="195146945" name="Slide Number Placeholder 3"/>
           <p:cNvSpPr>
             <a:spLocks noGrp="1"/>
           </p:cNvSpPr>
@@ -543,7 +543,7 @@
       </p:grpSpPr>
       <p:sp>
         <p:nvSpPr>
-          <p:cNvPr id="2" name="Slide Image Placeholder 1"/>
+          <p:cNvPr id="1302091178" name="Slide Image Placeholder 1"/>
           <p:cNvSpPr>
             <a:spLocks noChangeAspect="1" noGrp="1" noRot="1"/>
           </p:cNvSpPr>
@@ -555,7 +555,7 @@
       </p:sp>
       <p:sp>
         <p:nvSpPr>
-          <p:cNvPr id="3" name="Notes Placeholder 2"/>
+          <p:cNvPr id="1796713838" name="Notes Placeholder 2"/>
           <p:cNvSpPr>
             <a:spLocks noGrp="1"/>
           </p:cNvSpPr>
@@ -577,7 +577,7 @@
       </p:sp>
       <p:sp>
         <p:nvSpPr>
-          <p:cNvPr id="4" name="Slide Number Placeholder 3"/>
+          <p:cNvPr id="54400760" name="Slide Number Placeholder 3"/>
           <p:cNvSpPr>
             <a:spLocks noGrp="1"/>
           </p:cNvSpPr>
@@ -628,7 +628,7 @@
       </p:grpSpPr>
       <p:sp>
         <p:nvSpPr>
-          <p:cNvPr id="2" name="Slide Image Placeholder 1"/>
+          <p:cNvPr id="1868221924" name="Slide Image Placeholder 1"/>
           <p:cNvSpPr>
             <a:spLocks noChangeAspect="1" noGrp="1" noRot="1"/>
           </p:cNvSpPr>
@@ -640,7 +640,7 @@
       </p:sp>
       <p:sp>
         <p:nvSpPr>
-          <p:cNvPr id="3" name="Notes Placeholder 2"/>
+          <p:cNvPr id="1162962333" name="Notes Placeholder 2"/>
           <p:cNvSpPr>
             <a:spLocks noGrp="1"/>
           </p:cNvSpPr>
@@ -662,7 +662,7 @@
       </p:sp>
       <p:sp>
         <p:nvSpPr>
-          <p:cNvPr id="4" name="Slide Number Placeholder 3"/>
+          <p:cNvPr id="1136676434" name="Slide Number Placeholder 3"/>
           <p:cNvSpPr>
             <a:spLocks noGrp="1"/>
           </p:cNvSpPr>
@@ -713,7 +713,7 @@
       </p:grpSpPr>
       <p:sp>
         <p:nvSpPr>
-          <p:cNvPr id="2" name="Slide Image Placeholder 1"/>
+          <p:cNvPr id="1983565850" name="Slide Image Placeholder 1"/>
           <p:cNvSpPr>
             <a:spLocks noChangeAspect="1" noGrp="1" noRot="1"/>
           </p:cNvSpPr>
@@ -725,7 +725,7 @@
       </p:sp>
       <p:sp>
         <p:nvSpPr>
-          <p:cNvPr id="3" name="Notes Placeholder 2"/>
+          <p:cNvPr id="29192167" name="Notes Placeholder 2"/>
           <p:cNvSpPr>
             <a:spLocks noGrp="1"/>
           </p:cNvSpPr>
@@ -747,7 +747,7 @@
       </p:sp>
       <p:sp>
         <p:nvSpPr>
-          <p:cNvPr id="4" name="Slide Number Placeholder 3"/>
+          <p:cNvPr id="947248523" name="Slide Number Placeholder 3"/>
           <p:cNvSpPr>
             <a:spLocks noGrp="1"/>
           </p:cNvSpPr>
@@ -798,7 +798,7 @@
       </p:grpSpPr>
       <p:sp>
         <p:nvSpPr>
-          <p:cNvPr id="2" name="Slide Image Placeholder 1"/>
+          <p:cNvPr id="1094065530" name="Slide Image Placeholder 1"/>
           <p:cNvSpPr>
             <a:spLocks noChangeAspect="1" noGrp="1" noRot="1"/>
           </p:cNvSpPr>
@@ -810,7 +810,7 @@
       </p:sp>
       <p:sp>
         <p:nvSpPr>
-          <p:cNvPr id="3" name="Notes Placeholder 2"/>
+          <p:cNvPr id="716609558" name="Notes Placeholder 2"/>
           <p:cNvSpPr>
             <a:spLocks noGrp="1"/>
           </p:cNvSpPr>
@@ -832,7 +832,7 @@
       </p:sp>
       <p:sp>
         <p:nvSpPr>
-          <p:cNvPr id="4" name="Slide Number Placeholder 3"/>
+          <p:cNvPr id="1979326334" name="Slide Number Placeholder 3"/>
           <p:cNvSpPr>
             <a:spLocks noGrp="1"/>
           </p:cNvSpPr>
@@ -883,7 +883,7 @@
       </p:grpSpPr>
       <p:sp>
         <p:nvSpPr>
-          <p:cNvPr id="2" name="Slide Image Placeholder 1"/>
+          <p:cNvPr id="756700120" name="Slide Image Placeholder 1"/>
           <p:cNvSpPr>
             <a:spLocks noChangeAspect="1" noGrp="1" noRot="1"/>
           </p:cNvSpPr>
@@ -895,7 +895,7 @@
       </p:sp>
       <p:sp>
         <p:nvSpPr>
-          <p:cNvPr id="3" name="Notes Placeholder 2"/>
+          <p:cNvPr id="987355245" name="Notes Placeholder 2"/>
           <p:cNvSpPr>
             <a:spLocks noGrp="1"/>
           </p:cNvSpPr>
@@ -917,7 +917,7 @@
       </p:sp>
       <p:sp>
         <p:nvSpPr>
-          <p:cNvPr id="4" name="Slide Number Placeholder 3"/>
+          <p:cNvPr id="477299012" name="Slide Number Placeholder 3"/>
           <p:cNvSpPr>
             <a:spLocks noGrp="1"/>
           </p:cNvSpPr>
@@ -968,7 +968,7 @@
       </p:grpSpPr>
       <p:sp>
         <p:nvSpPr>
-          <p:cNvPr id="2" name="Slide Image Placeholder 1"/>
+          <p:cNvPr id="361482693" name="Slide Image Placeholder 1"/>
           <p:cNvSpPr>
             <a:spLocks noChangeAspect="1" noGrp="1" noRot="1"/>
           </p:cNvSpPr>
@@ -980,7 +980,7 @@
       </p:sp>
       <p:sp>
         <p:nvSpPr>
-          <p:cNvPr id="3" name="Notes Placeholder 2"/>
+          <p:cNvPr id="1549214499" name="Notes Placeholder 2"/>
           <p:cNvSpPr>
             <a:spLocks noGrp="1"/>
           </p:cNvSpPr>
@@ -1002,7 +1002,7 @@
       </p:sp>
       <p:sp>
         <p:nvSpPr>
-          <p:cNvPr id="4" name="Slide Number Placeholder 3"/>
+          <p:cNvPr id="1411711427" name="Slide Number Placeholder 3"/>
           <p:cNvSpPr>
             <a:spLocks noGrp="1"/>
           </p:cNvSpPr>
@@ -1053,7 +1053,7 @@
       </p:grpSpPr>
       <p:sp>
         <p:nvSpPr>
-          <p:cNvPr id="2" name="Slide Image Placeholder 1"/>
+          <p:cNvPr id="1907099737" name="Slide Image Placeholder 1"/>
           <p:cNvSpPr>
             <a:spLocks noChangeAspect="1" noGrp="1" noRot="1"/>
           </p:cNvSpPr>
@@ -1065,7 +1065,7 @@
       </p:sp>
       <p:sp>
         <p:nvSpPr>
-          <p:cNvPr id="3" name="Notes Placeholder 2"/>
+          <p:cNvPr id="1471827734" name="Notes Placeholder 2"/>
           <p:cNvSpPr>
             <a:spLocks noGrp="1"/>
           </p:cNvSpPr>
@@ -1087,7 +1087,7 @@
       </p:sp>
       <p:sp>
         <p:nvSpPr>
-          <p:cNvPr id="4" name="Slide Number Placeholder 3"/>
+          <p:cNvPr id="677489317" name="Slide Number Placeholder 3"/>
           <p:cNvSpPr>
             <a:spLocks noGrp="1"/>
           </p:cNvSpPr>
@@ -1138,7 +1138,7 @@
       </p:grpSpPr>
       <p:sp>
         <p:nvSpPr>
-          <p:cNvPr id="2" name="Slide Image Placeholder 1"/>
+          <p:cNvPr id="201727178" name="Slide Image Placeholder 1"/>
           <p:cNvSpPr>
             <a:spLocks noChangeAspect="1" noGrp="1" noRot="1"/>
           </p:cNvSpPr>
@@ -1150,7 +1150,7 @@
       </p:sp>
       <p:sp>
         <p:nvSpPr>
-          <p:cNvPr id="3" name="Notes Placeholder 2"/>
+          <p:cNvPr id="1634562164" name="Notes Placeholder 2"/>
           <p:cNvSpPr>
             <a:spLocks noGrp="1"/>
           </p:cNvSpPr>
@@ -1172,7 +1172,7 @@
       </p:sp>
       <p:sp>
         <p:nvSpPr>
-          <p:cNvPr id="4" name="Slide Number Placeholder 3"/>
+          <p:cNvPr id="1742372289" name="Slide Number Placeholder 3"/>
           <p:cNvSpPr>
             <a:spLocks noGrp="1"/>
           </p:cNvSpPr>
@@ -1223,7 +1223,7 @@
       </p:grpSpPr>
       <p:sp>
         <p:nvSpPr>
-          <p:cNvPr id="2" name="Slide Image Placeholder 1"/>
+          <p:cNvPr id="997890027" name="Slide Image Placeholder 1"/>
           <p:cNvSpPr>
             <a:spLocks noChangeAspect="1" noGrp="1" noRot="1"/>
           </p:cNvSpPr>
@@ -1235,7 +1235,7 @@
       </p:sp>
       <p:sp>
         <p:nvSpPr>
-          <p:cNvPr id="3" name="Notes Placeholder 2"/>
+          <p:cNvPr id="1609768383" name="Notes Placeholder 2"/>
           <p:cNvSpPr>
             <a:spLocks noGrp="1"/>
           </p:cNvSpPr>
@@ -1257,7 +1257,7 @@
       </p:sp>
       <p:sp>
         <p:nvSpPr>
-          <p:cNvPr id="4" name="Slide Number Placeholder 3"/>
+          <p:cNvPr id="2129809249" name="Slide Number Placeholder 3"/>
           <p:cNvSpPr>
             <a:spLocks noGrp="1"/>
           </p:cNvSpPr>
@@ -1308,7 +1308,7 @@
       </p:grpSpPr>
       <p:sp>
         <p:nvSpPr>
-          <p:cNvPr id="184512325" name="Title 1"/>
+          <p:cNvPr id="1637556125" name="Title 1"/>
           <p:cNvSpPr>
             <a:spLocks noGrp="1"/>
           </p:cNvSpPr>
@@ -1339,7 +1339,7 @@
       </p:sp>
       <p:sp>
         <p:nvSpPr>
-          <p:cNvPr id="1129192517" name="Subtitle 2"/>
+          <p:cNvPr id="1895256845" name="Subtitle 2"/>
           <p:cNvSpPr>
             <a:spLocks noGrp="1"/>
           </p:cNvSpPr>
@@ -1461,7 +1461,7 @@
       </p:sp>
       <p:sp>
         <p:nvSpPr>
-          <p:cNvPr id="1270925356" name="Date Placeholder 3"/>
+          <p:cNvPr id="1071761627" name="Date Placeholder 3"/>
           <p:cNvSpPr>
             <a:spLocks noGrp="1"/>
           </p:cNvSpPr>
@@ -1487,7 +1487,7 @@
       </p:sp>
       <p:sp>
         <p:nvSpPr>
-          <p:cNvPr id="424662264" name="Footer Placeholder 4"/>
+          <p:cNvPr id="879517707" name="Footer Placeholder 4"/>
           <p:cNvSpPr>
             <a:spLocks noGrp="1"/>
           </p:cNvSpPr>
@@ -1509,7 +1509,7 @@
       </p:sp>
       <p:sp>
         <p:nvSpPr>
-          <p:cNvPr id="167359892" name="Slide Number Placeholder 5"/>
+          <p:cNvPr id="915975634" name="Slide Number Placeholder 5"/>
           <p:cNvSpPr>
             <a:spLocks noGrp="1"/>
           </p:cNvSpPr>
@@ -1560,7 +1560,7 @@
       </p:grpSpPr>
       <p:sp>
         <p:nvSpPr>
-          <p:cNvPr id="1544367764" name="Title 1"/>
+          <p:cNvPr id="21342934" name="Title 1"/>
           <p:cNvSpPr>
             <a:spLocks noGrp="1"/>
           </p:cNvSpPr>
@@ -1586,7 +1586,7 @@
       </p:sp>
       <p:sp>
         <p:nvSpPr>
-          <p:cNvPr id="225877997" name="Vertical Text Placeholder 2"/>
+          <p:cNvPr id="1498696674" name="Vertical Text Placeholder 2"/>
           <p:cNvSpPr>
             <a:spLocks noGrp="1"/>
           </p:cNvSpPr>
@@ -1652,7 +1652,7 @@
       </p:sp>
       <p:sp>
         <p:nvSpPr>
-          <p:cNvPr id="714013312" name="Date Placeholder 3"/>
+          <p:cNvPr id="13210649" name="Date Placeholder 3"/>
           <p:cNvSpPr>
             <a:spLocks noGrp="1"/>
           </p:cNvSpPr>
@@ -1678,7 +1678,7 @@
       </p:sp>
       <p:sp>
         <p:nvSpPr>
-          <p:cNvPr id="2100452063" name="Footer Placeholder 4"/>
+          <p:cNvPr id="1352842414" name="Footer Placeholder 4"/>
           <p:cNvSpPr>
             <a:spLocks noGrp="1"/>
           </p:cNvSpPr>
@@ -1700,7 +1700,7 @@
       </p:sp>
       <p:sp>
         <p:nvSpPr>
-          <p:cNvPr id="334886296" name="Slide Number Placeholder 5"/>
+          <p:cNvPr id="477605850" name="Slide Number Placeholder 5"/>
           <p:cNvSpPr>
             <a:spLocks noGrp="1"/>
           </p:cNvSpPr>
@@ -1751,7 +1751,7 @@
       </p:grpSpPr>
       <p:sp>
         <p:nvSpPr>
-          <p:cNvPr id="575162567" name="Vertical Title 1"/>
+          <p:cNvPr id="1464916660" name="Vertical Title 1"/>
           <p:cNvSpPr>
             <a:spLocks noGrp="1"/>
           </p:cNvSpPr>
@@ -1782,7 +1782,7 @@
       </p:sp>
       <p:sp>
         <p:nvSpPr>
-          <p:cNvPr id="2065706657" name="Vertical Text Placeholder 2"/>
+          <p:cNvPr id="1099772501" name="Vertical Text Placeholder 2"/>
           <p:cNvSpPr>
             <a:spLocks noGrp="1"/>
           </p:cNvSpPr>
@@ -1853,7 +1853,7 @@
       </p:sp>
       <p:sp>
         <p:nvSpPr>
-          <p:cNvPr id="1692522167" name="Date Placeholder 3"/>
+          <p:cNvPr id="1681100165" name="Date Placeholder 3"/>
           <p:cNvSpPr>
             <a:spLocks noGrp="1"/>
           </p:cNvSpPr>
@@ -1879,7 +1879,7 @@
       </p:sp>
       <p:sp>
         <p:nvSpPr>
-          <p:cNvPr id="48879423" name="Footer Placeholder 4"/>
+          <p:cNvPr id="220144478" name="Footer Placeholder 4"/>
           <p:cNvSpPr>
             <a:spLocks noGrp="1"/>
           </p:cNvSpPr>
@@ -1901,7 +1901,7 @@
       </p:sp>
       <p:sp>
         <p:nvSpPr>
-          <p:cNvPr id="1870919855" name="Slide Number Placeholder 5"/>
+          <p:cNvPr id="457129831" name="Slide Number Placeholder 5"/>
           <p:cNvSpPr>
             <a:spLocks noGrp="1"/>
           </p:cNvSpPr>
@@ -1952,7 +1952,7 @@
       </p:grpSpPr>
       <p:sp>
         <p:nvSpPr>
-          <p:cNvPr id="1368573120" name="Title 1"/>
+          <p:cNvPr id="1085217749" name="Title 1"/>
           <p:cNvSpPr>
             <a:spLocks noGrp="1"/>
           </p:cNvSpPr>
@@ -1978,7 +1978,7 @@
       </p:sp>
       <p:sp>
         <p:nvSpPr>
-          <p:cNvPr id="885481091" name="Content Placeholder 2"/>
+          <p:cNvPr id="522412501" name="Content Placeholder 2"/>
           <p:cNvSpPr>
             <a:spLocks noGrp="1"/>
           </p:cNvSpPr>
@@ -2044,7 +2044,7 @@
       </p:sp>
       <p:sp>
         <p:nvSpPr>
-          <p:cNvPr id="1720533284" name="Date Placeholder 3"/>
+          <p:cNvPr id="1934190693" name="Date Placeholder 3"/>
           <p:cNvSpPr>
             <a:spLocks noGrp="1"/>
           </p:cNvSpPr>
@@ -2070,7 +2070,7 @@
       </p:sp>
       <p:sp>
         <p:nvSpPr>
-          <p:cNvPr id="1647970739" name="Footer Placeholder 4"/>
+          <p:cNvPr id="870368597" name="Footer Placeholder 4"/>
           <p:cNvSpPr>
             <a:spLocks noGrp="1"/>
           </p:cNvSpPr>
@@ -2092,7 +2092,7 @@
       </p:sp>
       <p:sp>
         <p:nvSpPr>
-          <p:cNvPr id="206242303" name="Slide Number Placeholder 5"/>
+          <p:cNvPr id="1362753299" name="Slide Number Placeholder 5"/>
           <p:cNvSpPr>
             <a:spLocks noGrp="1"/>
           </p:cNvSpPr>
@@ -2143,7 +2143,7 @@
       </p:grpSpPr>
       <p:sp>
         <p:nvSpPr>
-          <p:cNvPr id="1822006860" name="Title 1"/>
+          <p:cNvPr id="1974321082" name="Title 1"/>
           <p:cNvSpPr>
             <a:spLocks noGrp="1"/>
           </p:cNvSpPr>
@@ -2178,7 +2178,7 @@
       </p:sp>
       <p:sp>
         <p:nvSpPr>
-          <p:cNvPr id="392716593" name="Text Placeholder 2"/>
+          <p:cNvPr id="985682205" name="Text Placeholder 2"/>
           <p:cNvSpPr>
             <a:spLocks noGrp="1"/>
           </p:cNvSpPr>
@@ -2300,7 +2300,7 @@
       </p:sp>
       <p:sp>
         <p:nvSpPr>
-          <p:cNvPr id="103556188" name="Date Placeholder 3"/>
+          <p:cNvPr id="2065342544" name="Date Placeholder 3"/>
           <p:cNvSpPr>
             <a:spLocks noGrp="1"/>
           </p:cNvSpPr>
@@ -2326,7 +2326,7 @@
       </p:sp>
       <p:sp>
         <p:nvSpPr>
-          <p:cNvPr id="1312293853" name="Footer Placeholder 4"/>
+          <p:cNvPr id="1290695664" name="Footer Placeholder 4"/>
           <p:cNvSpPr>
             <a:spLocks noGrp="1"/>
           </p:cNvSpPr>
@@ -2348,7 +2348,7 @@
       </p:sp>
       <p:sp>
         <p:nvSpPr>
-          <p:cNvPr id="133786770" name="Slide Number Placeholder 5"/>
+          <p:cNvPr id="525687398" name="Slide Number Placeholder 5"/>
           <p:cNvSpPr>
             <a:spLocks noGrp="1"/>
           </p:cNvSpPr>
@@ -2399,7 +2399,7 @@
       </p:grpSpPr>
       <p:sp>
         <p:nvSpPr>
-          <p:cNvPr id="124233699" name="Title 1"/>
+          <p:cNvPr id="1030010906" name="Title 1"/>
           <p:cNvSpPr>
             <a:spLocks noGrp="1"/>
           </p:cNvSpPr>
@@ -2425,7 +2425,7 @@
       </p:sp>
       <p:sp>
         <p:nvSpPr>
-          <p:cNvPr id="1932039273" name="Content Placeholder 2"/>
+          <p:cNvPr id="1119859234" name="Content Placeholder 2"/>
           <p:cNvSpPr>
             <a:spLocks noGrp="1"/>
           </p:cNvSpPr>
@@ -2524,7 +2524,7 @@
       </p:sp>
       <p:sp>
         <p:nvSpPr>
-          <p:cNvPr id="240327069" name="Content Placeholder 3"/>
+          <p:cNvPr id="477268739" name="Content Placeholder 3"/>
           <p:cNvSpPr>
             <a:spLocks noGrp="1"/>
           </p:cNvSpPr>
@@ -2623,7 +2623,7 @@
       </p:sp>
       <p:sp>
         <p:nvSpPr>
-          <p:cNvPr id="1693348532" name="Date Placeholder 4"/>
+          <p:cNvPr id="1378784302" name="Date Placeholder 4"/>
           <p:cNvSpPr>
             <a:spLocks noGrp="1"/>
           </p:cNvSpPr>
@@ -2649,7 +2649,7 @@
       </p:sp>
       <p:sp>
         <p:nvSpPr>
-          <p:cNvPr id="1160527318" name="Footer Placeholder 5"/>
+          <p:cNvPr id="1972350077" name="Footer Placeholder 5"/>
           <p:cNvSpPr>
             <a:spLocks noGrp="1"/>
           </p:cNvSpPr>
@@ -2671,7 +2671,7 @@
       </p:sp>
       <p:sp>
         <p:nvSpPr>
-          <p:cNvPr id="561611829" name="Slide Number Placeholder 6"/>
+          <p:cNvPr id="618306713" name="Slide Number Placeholder 6"/>
           <p:cNvSpPr>
             <a:spLocks noGrp="1"/>
           </p:cNvSpPr>
@@ -2722,7 +2722,7 @@
       </p:grpSpPr>
       <p:sp>
         <p:nvSpPr>
-          <p:cNvPr id="1217898980" name="Title 1"/>
+          <p:cNvPr id="357455008" name="Title 1"/>
           <p:cNvSpPr>
             <a:spLocks noGrp="1"/>
           </p:cNvSpPr>
@@ -2752,7 +2752,7 @@
       </p:sp>
       <p:sp>
         <p:nvSpPr>
-          <p:cNvPr id="603763758" name="Text Placeholder 2"/>
+          <p:cNvPr id="403124476" name="Text Placeholder 2"/>
           <p:cNvSpPr>
             <a:spLocks noGrp="1"/>
           </p:cNvSpPr>
@@ -2820,7 +2820,7 @@
       </p:sp>
       <p:sp>
         <p:nvSpPr>
-          <p:cNvPr id="2106523963" name="Content Placeholder 3"/>
+          <p:cNvPr id="904188911" name="Content Placeholder 3"/>
           <p:cNvSpPr>
             <a:spLocks noGrp="1"/>
           </p:cNvSpPr>
@@ -2919,7 +2919,7 @@
       </p:sp>
       <p:sp>
         <p:nvSpPr>
-          <p:cNvPr id="1103381314" name="Text Placeholder 4"/>
+          <p:cNvPr id="43957230" name="Text Placeholder 4"/>
           <p:cNvSpPr>
             <a:spLocks noGrp="1"/>
           </p:cNvSpPr>
@@ -2987,7 +2987,7 @@
       </p:sp>
       <p:sp>
         <p:nvSpPr>
-          <p:cNvPr id="1983897885" name="Content Placeholder 5"/>
+          <p:cNvPr id="440665691" name="Content Placeholder 5"/>
           <p:cNvSpPr>
             <a:spLocks noGrp="1"/>
           </p:cNvSpPr>
@@ -3086,7 +3086,7 @@
       </p:sp>
       <p:sp>
         <p:nvSpPr>
-          <p:cNvPr id="1719690588" name="Date Placeholder 6"/>
+          <p:cNvPr id="626193767" name="Date Placeholder 6"/>
           <p:cNvSpPr>
             <a:spLocks noGrp="1"/>
           </p:cNvSpPr>
@@ -3112,7 +3112,7 @@
       </p:sp>
       <p:sp>
         <p:nvSpPr>
-          <p:cNvPr id="65017218" name="Footer Placeholder 7"/>
+          <p:cNvPr id="1327895310" name="Footer Placeholder 7"/>
           <p:cNvSpPr>
             <a:spLocks noGrp="1"/>
           </p:cNvSpPr>
@@ -3134,7 +3134,7 @@
       </p:sp>
       <p:sp>
         <p:nvSpPr>
-          <p:cNvPr id="797213491" name="Slide Number Placeholder 8"/>
+          <p:cNvPr id="436270108" name="Slide Number Placeholder 8"/>
           <p:cNvSpPr>
             <a:spLocks noGrp="1"/>
           </p:cNvSpPr>
@@ -3185,7 +3185,7 @@
       </p:grpSpPr>
       <p:sp>
         <p:nvSpPr>
-          <p:cNvPr id="50483308" name="Title 1"/>
+          <p:cNvPr id="2133611883" name="Title 1"/>
           <p:cNvSpPr>
             <a:spLocks noGrp="1"/>
           </p:cNvSpPr>
@@ -3211,7 +3211,7 @@
       </p:sp>
       <p:sp>
         <p:nvSpPr>
-          <p:cNvPr id="1009664304" name="Date Placeholder 2"/>
+          <p:cNvPr id="941458998" name="Date Placeholder 2"/>
           <p:cNvSpPr>
             <a:spLocks noGrp="1"/>
           </p:cNvSpPr>
@@ -3237,7 +3237,7 @@
       </p:sp>
       <p:sp>
         <p:nvSpPr>
-          <p:cNvPr id="2127689881" name="Footer Placeholder 3"/>
+          <p:cNvPr id="1432985445" name="Footer Placeholder 3"/>
           <p:cNvSpPr>
             <a:spLocks noGrp="1"/>
           </p:cNvSpPr>
@@ -3259,7 +3259,7 @@
       </p:sp>
       <p:sp>
         <p:nvSpPr>
-          <p:cNvPr id="425222028" name="Slide Number Placeholder 4"/>
+          <p:cNvPr id="969780804" name="Slide Number Placeholder 4"/>
           <p:cNvSpPr>
             <a:spLocks noGrp="1"/>
           </p:cNvSpPr>
@@ -3310,7 +3310,7 @@
       </p:grpSpPr>
       <p:sp>
         <p:nvSpPr>
-          <p:cNvPr id="548154591" name="Date Placeholder 1"/>
+          <p:cNvPr id="1821991321" name="Date Placeholder 1"/>
           <p:cNvSpPr>
             <a:spLocks noGrp="1"/>
           </p:cNvSpPr>
@@ -3336,7 +3336,7 @@
       </p:sp>
       <p:sp>
         <p:nvSpPr>
-          <p:cNvPr id="78350200" name="Footer Placeholder 2"/>
+          <p:cNvPr id="1199044056" name="Footer Placeholder 2"/>
           <p:cNvSpPr>
             <a:spLocks noGrp="1"/>
           </p:cNvSpPr>
@@ -3358,7 +3358,7 @@
       </p:sp>
       <p:sp>
         <p:nvSpPr>
-          <p:cNvPr id="634416169" name="Slide Number Placeholder 3"/>
+          <p:cNvPr id="1619653801" name="Slide Number Placeholder 3"/>
           <p:cNvSpPr>
             <a:spLocks noGrp="1"/>
           </p:cNvSpPr>
@@ -3409,7 +3409,7 @@
       </p:grpSpPr>
       <p:sp>
         <p:nvSpPr>
-          <p:cNvPr id="428221608" name="Title 1"/>
+          <p:cNvPr id="1664405436" name="Title 1"/>
           <p:cNvSpPr>
             <a:spLocks noGrp="1"/>
           </p:cNvSpPr>
@@ -3444,7 +3444,7 @@
       </p:sp>
       <p:sp>
         <p:nvSpPr>
-          <p:cNvPr id="196057352" name="Content Placeholder 2"/>
+          <p:cNvPr id="1773787604" name="Content Placeholder 2"/>
           <p:cNvSpPr>
             <a:spLocks noGrp="1"/>
           </p:cNvSpPr>
@@ -3543,7 +3543,7 @@
       </p:sp>
       <p:sp>
         <p:nvSpPr>
-          <p:cNvPr id="1815906669" name="Text Placeholder 3"/>
+          <p:cNvPr id="160160652" name="Text Placeholder 3"/>
           <p:cNvSpPr>
             <a:spLocks noGrp="1"/>
           </p:cNvSpPr>
@@ -3611,7 +3611,7 @@
       </p:sp>
       <p:sp>
         <p:nvSpPr>
-          <p:cNvPr id="1035071999" name="Date Placeholder 4"/>
+          <p:cNvPr id="13219444" name="Date Placeholder 4"/>
           <p:cNvSpPr>
             <a:spLocks noGrp="1"/>
           </p:cNvSpPr>
@@ -3637,7 +3637,7 @@
       </p:sp>
       <p:sp>
         <p:nvSpPr>
-          <p:cNvPr id="780136434" name="Footer Placeholder 5"/>
+          <p:cNvPr id="828123071" name="Footer Placeholder 5"/>
           <p:cNvSpPr>
             <a:spLocks noGrp="1"/>
           </p:cNvSpPr>
@@ -3659,7 +3659,7 @@
       </p:sp>
       <p:sp>
         <p:nvSpPr>
-          <p:cNvPr id="1324907834" name="Slide Number Placeholder 6"/>
+          <p:cNvPr id="266923403" name="Slide Number Placeholder 6"/>
           <p:cNvSpPr>
             <a:spLocks noGrp="1"/>
           </p:cNvSpPr>
@@ -3710,7 +3710,7 @@
       </p:grpSpPr>
       <p:sp>
         <p:nvSpPr>
-          <p:cNvPr id="2010591723" name="Title 1"/>
+          <p:cNvPr id="767066317" name="Title 1"/>
           <p:cNvSpPr>
             <a:spLocks noGrp="1"/>
           </p:cNvSpPr>
@@ -3745,7 +3745,7 @@
       </p:sp>
       <p:sp>
         <p:nvSpPr>
-          <p:cNvPr id="1591899921" name="Picture Placeholder 2"/>
+          <p:cNvPr id="511421361" name="Picture Placeholder 2"/>
           <p:cNvSpPr>
             <a:spLocks noGrp="1"/>
           </p:cNvSpPr>
@@ -3809,7 +3809,7 @@
       </p:sp>
       <p:sp>
         <p:nvSpPr>
-          <p:cNvPr id="1331308996" name="Text Placeholder 3"/>
+          <p:cNvPr id="988710466" name="Text Placeholder 3"/>
           <p:cNvSpPr>
             <a:spLocks noGrp="1"/>
           </p:cNvSpPr>
@@ -3877,7 +3877,7 @@
       </p:sp>
       <p:sp>
         <p:nvSpPr>
-          <p:cNvPr id="1474748639" name="Date Placeholder 4"/>
+          <p:cNvPr id="210268056" name="Date Placeholder 4"/>
           <p:cNvSpPr>
             <a:spLocks noGrp="1"/>
           </p:cNvSpPr>
@@ -3903,7 +3903,7 @@
       </p:sp>
       <p:sp>
         <p:nvSpPr>
-          <p:cNvPr id="1619499831" name="Footer Placeholder 5"/>
+          <p:cNvPr id="1317809437" name="Footer Placeholder 5"/>
           <p:cNvSpPr>
             <a:spLocks noGrp="1"/>
           </p:cNvSpPr>
@@ -3925,7 +3925,7 @@
       </p:sp>
       <p:sp>
         <p:nvSpPr>
-          <p:cNvPr id="1131641489" name="Slide Number Placeholder 6"/>
+          <p:cNvPr id="2003769512" name="Slide Number Placeholder 6"/>
           <p:cNvSpPr>
             <a:spLocks noGrp="1"/>
           </p:cNvSpPr>
@@ -3981,7 +3981,7 @@
       </p:grpSpPr>
       <p:sp>
         <p:nvSpPr>
-          <p:cNvPr id="543567471" name="Title Placeholder 1"/>
+          <p:cNvPr id="96323197" name="Title Placeholder 1"/>
           <p:cNvSpPr>
             <a:spLocks noGrp="1"/>
           </p:cNvSpPr>
@@ -4017,7 +4017,7 @@
       </p:sp>
       <p:sp>
         <p:nvSpPr>
-          <p:cNvPr id="1395263143" name="Text Placeholder 2"/>
+          <p:cNvPr id="1817814308" name="Text Placeholder 2"/>
           <p:cNvSpPr>
             <a:spLocks noGrp="1"/>
           </p:cNvSpPr>
@@ -4093,7 +4093,7 @@
       </p:sp>
       <p:sp>
         <p:nvSpPr>
-          <p:cNvPr id="1467305095" name="Date Placeholder 3"/>
+          <p:cNvPr id="929821041" name="Date Placeholder 3"/>
           <p:cNvSpPr>
             <a:spLocks noGrp="1"/>
           </p:cNvSpPr>
@@ -4137,7 +4137,7 @@
       </p:sp>
       <p:sp>
         <p:nvSpPr>
-          <p:cNvPr id="633001572" name="Footer Placeholder 4"/>
+          <p:cNvPr id="128183161" name="Footer Placeholder 4"/>
           <p:cNvSpPr>
             <a:spLocks noGrp="1"/>
           </p:cNvSpPr>
@@ -4177,7 +4177,7 @@
       </p:sp>
       <p:sp>
         <p:nvSpPr>
-          <p:cNvPr id="298243208" name="Slide Number Placeholder 5"/>
+          <p:cNvPr id="213781711" name="Slide Number Placeholder 5"/>
           <p:cNvSpPr>
             <a:spLocks noGrp="1"/>
           </p:cNvSpPr>
@@ -4507,7 +4507,7 @@
       </p:grpSpPr>
       <p:sp>
         <p:nvSpPr>
-          <p:cNvPr id="1622362425" name="Rectangle 1"/>
+          <p:cNvPr id="2046610427" name="Rectangle 1"/>
           <p:cNvSpPr/>
           <p:nvPr/>
         </p:nvSpPr>
@@ -4554,7 +4554,7 @@
       </p:sp>
       <p:sp>
         <p:nvSpPr>
-          <p:cNvPr id="1696135420" name="TextBox 2"/>
+          <p:cNvPr id="1054822584" name="TextBox 2"/>
           <p:cNvSpPr txBox="1"/>
           <p:nvPr/>
         </p:nvSpPr>
@@ -4592,7 +4592,7 @@
       </p:sp>
       <p:sp>
         <p:nvSpPr>
-          <p:cNvPr id="1291529303" name="TextBox 3"/>
+          <p:cNvPr id="194441985" name="TextBox 3"/>
           <p:cNvSpPr txBox="1"/>
           <p:nvPr/>
         </p:nvSpPr>
@@ -4630,7 +4630,7 @@
       </p:sp>
       <p:sp>
         <p:nvSpPr>
-          <p:cNvPr id="559720158" name="TextBox 4"/>
+          <p:cNvPr id="1390185141" name="TextBox 4"/>
           <p:cNvSpPr txBox="1"/>
           <p:nvPr/>
         </p:nvSpPr>
@@ -4668,14 +4668,14 @@
       </p:sp>
       <p:sp>
         <p:nvSpPr>
-          <p:cNvPr id="318983512" name="TextBox 5"/>
+          <p:cNvPr id="1749218667" name="TextBox 5"/>
           <p:cNvSpPr txBox="1"/>
           <p:nvPr/>
         </p:nvSpPr>
         <p:spPr bwMode="auto">
           <a:xfrm>
             <a:off x="914400" y="4114800"/>
-            <a:ext cx="10515600" cy="548640"/>
+            <a:ext cx="10518479" cy="213719"/>
           </a:xfrm>
           <a:prstGeom prst="rect">
             <a:avLst/>
@@ -4698,15 +4698,15 @@
                 </a:solidFill>
                 <a:latin typeface="Segoe UI"/>
               </a:rPr>
-              <a:t>Soliman  ·  Final synthesis capstone, Udacity AI Mastery</a:t>
-            </a:r>
-            <a:endParaRPr/>
-          </a:p>
-        </p:txBody>
-      </p:sp>
-      <p:sp>
-        <p:nvSpPr>
-          <p:cNvPr id="806250702" name="Rectangle 6"/>
+              <a:t>Mohamed Soliman  ·  Final synthesis capstone, Udacity AI Mastery</a:t>
+            </a:r>
+            <a:endParaRPr/>
+          </a:p>
+        </p:txBody>
+      </p:sp>
+      <p:sp>
+        <p:nvSpPr>
+          <p:cNvPr id="1462244308" name="Rectangle 6"/>
           <p:cNvSpPr/>
           <p:nvPr/>
         </p:nvSpPr>
@@ -4755,7 +4755,7 @@
       </p:sp>
       <p:sp>
         <p:nvSpPr>
-          <p:cNvPr id="879247593" name="TextBox 7"/>
+          <p:cNvPr id="8806990" name="TextBox 7"/>
           <p:cNvSpPr txBox="1"/>
           <p:nvPr/>
         </p:nvSpPr>
@@ -4841,7 +4841,7 @@
       </p:grpSpPr>
       <p:sp>
         <p:nvSpPr>
-          <p:cNvPr id="933025291" name="TextBox 1"/>
+          <p:cNvPr id="642544405" name="TextBox 1"/>
           <p:cNvSpPr txBox="1"/>
           <p:nvPr/>
         </p:nvSpPr>
@@ -4879,7 +4879,7 @@
       </p:sp>
       <p:sp>
         <p:nvSpPr>
-          <p:cNvPr id="1501334107" name="TextBox 2"/>
+          <p:cNvPr id="273716790" name="TextBox 2"/>
           <p:cNvSpPr txBox="1"/>
           <p:nvPr/>
         </p:nvSpPr>
@@ -4917,7 +4917,7 @@
       </p:sp>
       <p:sp>
         <p:nvSpPr>
-          <p:cNvPr id="1735059274" name="TextBox 3"/>
+          <p:cNvPr id="248056886" name="TextBox 3"/>
           <p:cNvSpPr txBox="1"/>
           <p:nvPr/>
         </p:nvSpPr>
@@ -4955,7 +4955,7 @@
       </p:sp>
       <p:sp>
         <p:nvSpPr>
-          <p:cNvPr id="1404975094" name="Rectangle 4"/>
+          <p:cNvPr id="1733424973" name="Rectangle 4"/>
           <p:cNvSpPr/>
           <p:nvPr/>
         </p:nvSpPr>
@@ -5002,7 +5002,7 @@
       </p:sp>
       <p:sp>
         <p:nvSpPr>
-          <p:cNvPr id="673946393" name="Rectangle 5"/>
+          <p:cNvPr id="1897415059" name="Rectangle 5"/>
           <p:cNvSpPr/>
           <p:nvPr/>
         </p:nvSpPr>
@@ -5051,7 +5051,7 @@
       </p:sp>
       <p:sp>
         <p:nvSpPr>
-          <p:cNvPr id="973443328" name="TextBox 6"/>
+          <p:cNvPr id="1549105617" name="TextBox 6"/>
           <p:cNvSpPr txBox="1"/>
           <p:nvPr/>
         </p:nvSpPr>
@@ -5089,7 +5089,7 @@
       </p:sp>
       <p:sp>
         <p:nvSpPr>
-          <p:cNvPr id="1316725014" name="TextBox 7"/>
+          <p:cNvPr id="69127758" name="TextBox 7"/>
           <p:cNvSpPr txBox="1"/>
           <p:nvPr/>
         </p:nvSpPr>
@@ -5127,7 +5127,7 @@
       </p:sp>
       <p:sp>
         <p:nvSpPr>
-          <p:cNvPr id="117613470" name="Rectangle 8"/>
+          <p:cNvPr id="113995616" name="Rectangle 8"/>
           <p:cNvSpPr/>
           <p:nvPr/>
         </p:nvSpPr>
@@ -5176,7 +5176,7 @@
       </p:sp>
       <p:sp>
         <p:nvSpPr>
-          <p:cNvPr id="1814816547" name="TextBox 9"/>
+          <p:cNvPr id="42922354" name="TextBox 9"/>
           <p:cNvSpPr txBox="1"/>
           <p:nvPr/>
         </p:nvSpPr>
@@ -5214,7 +5214,7 @@
       </p:sp>
       <p:sp>
         <p:nvSpPr>
-          <p:cNvPr id="1825857684" name="TextBox 10"/>
+          <p:cNvPr id="707751935" name="TextBox 10"/>
           <p:cNvSpPr txBox="1"/>
           <p:nvPr/>
         </p:nvSpPr>
@@ -5252,7 +5252,7 @@
       </p:sp>
       <p:sp>
         <p:nvSpPr>
-          <p:cNvPr id="565451691" name="Rectangle 11"/>
+          <p:cNvPr id="124897892" name="Rectangle 11"/>
           <p:cNvSpPr/>
           <p:nvPr/>
         </p:nvSpPr>
@@ -5301,7 +5301,7 @@
       </p:sp>
       <p:sp>
         <p:nvSpPr>
-          <p:cNvPr id="538946424" name="TextBox 12"/>
+          <p:cNvPr id="1855335307" name="TextBox 12"/>
           <p:cNvSpPr txBox="1"/>
           <p:nvPr/>
         </p:nvSpPr>
@@ -5339,7 +5339,7 @@
       </p:sp>
       <p:sp>
         <p:nvSpPr>
-          <p:cNvPr id="1182071396" name="TextBox 13"/>
+          <p:cNvPr id="207424679" name="TextBox 13"/>
           <p:cNvSpPr txBox="1"/>
           <p:nvPr/>
         </p:nvSpPr>
@@ -5377,7 +5377,7 @@
       </p:sp>
       <p:sp>
         <p:nvSpPr>
-          <p:cNvPr id="886639591" name="TextBox 14"/>
+          <p:cNvPr id="294177522" name="TextBox 14"/>
           <p:cNvSpPr txBox="1"/>
           <p:nvPr/>
         </p:nvSpPr>
@@ -5415,45 +5415,7 @@
       </p:sp>
       <p:sp>
         <p:nvSpPr>
-          <p:cNvPr id="1967912910" name="TextBox 15"/>
-          <p:cNvSpPr txBox="1"/>
-          <p:nvPr/>
-        </p:nvSpPr>
-        <p:spPr bwMode="auto">
-          <a:xfrm>
-            <a:off x="457200" y="6446520"/>
-            <a:ext cx="7315200" cy="320040"/>
-          </a:xfrm>
-          <a:prstGeom prst="rect">
-            <a:avLst/>
-          </a:prstGeom>
-          <a:noFill/>
-        </p:spPr>
-        <p:txBody>
-          <a:bodyPr wrap="square" lIns="0" tIns="0" rIns="0" bIns="0">
-            <a:spAutoFit/>
-          </a:bodyPr>
-          <a:lstStyle/>
-          <a:p>
-            <a:pPr>
-              <a:defRPr/>
-            </a:pPr>
-            <a:r>
-              <a:rPr sz="900" b="0" i="0">
-                <a:solidFill>
-                  <a:srgbClr val="555555"/>
-                </a:solidFill>
-                <a:latin typeface="Segoe UI"/>
-              </a:rPr>
-              <a:t>Project 7 — SOC Security Operations Copilot  —  Soliman</a:t>
-            </a:r>
-            <a:endParaRPr/>
-          </a:p>
-        </p:txBody>
-      </p:sp>
-      <p:sp>
-        <p:nvSpPr>
-          <p:cNvPr id="1745852593" name="TextBox 16"/>
+          <p:cNvPr id="1858288942" name="TextBox 16"/>
           <p:cNvSpPr txBox="1"/>
           <p:nvPr/>
         </p:nvSpPr>
@@ -5524,7 +5486,7 @@
       </p:grpSpPr>
       <p:sp>
         <p:nvSpPr>
-          <p:cNvPr id="184528543" name="TextBox 1"/>
+          <p:cNvPr id="1036209379" name="TextBox 1"/>
           <p:cNvSpPr txBox="1"/>
           <p:nvPr/>
         </p:nvSpPr>
@@ -5562,7 +5524,7 @@
       </p:sp>
       <p:sp>
         <p:nvSpPr>
-          <p:cNvPr id="1767423980" name="TextBox 2"/>
+          <p:cNvPr id="836275626" name="TextBox 2"/>
           <p:cNvSpPr txBox="1"/>
           <p:nvPr/>
         </p:nvSpPr>
@@ -5600,7 +5562,7 @@
       </p:sp>
       <p:sp>
         <p:nvSpPr>
-          <p:cNvPr id="1580855644" name="TextBox 3"/>
+          <p:cNvPr id="1674858403" name="TextBox 3"/>
           <p:cNvSpPr txBox="1"/>
           <p:nvPr/>
         </p:nvSpPr>
@@ -5638,7 +5600,7 @@
       </p:sp>
       <p:sp>
         <p:nvSpPr>
-          <p:cNvPr id="357605245" name="Rectangle 4"/>
+          <p:cNvPr id="1491188169" name="Rectangle 4"/>
           <p:cNvSpPr/>
           <p:nvPr/>
         </p:nvSpPr>
@@ -5685,7 +5647,7 @@
       </p:sp>
       <p:sp>
         <p:nvSpPr>
-          <p:cNvPr id="1854838065" name="TextBox 5"/>
+          <p:cNvPr id="1106802459" name="TextBox 5"/>
           <p:cNvSpPr txBox="1"/>
           <p:nvPr/>
         </p:nvSpPr>
@@ -5792,7 +5754,7 @@
       </p:sp>
       <p:sp>
         <p:nvSpPr>
-          <p:cNvPr id="1570275607" name="Rectangle 6"/>
+          <p:cNvPr id="739198386" name="Rectangle 6"/>
           <p:cNvSpPr/>
           <p:nvPr/>
         </p:nvSpPr>
@@ -5841,7 +5803,7 @@
       </p:sp>
       <p:sp>
         <p:nvSpPr>
-          <p:cNvPr id="639420816" name="TextBox 7"/>
+          <p:cNvPr id="923947886" name="TextBox 7"/>
           <p:cNvSpPr txBox="1"/>
           <p:nvPr/>
         </p:nvSpPr>
@@ -5879,7 +5841,7 @@
       </p:sp>
       <p:sp>
         <p:nvSpPr>
-          <p:cNvPr id="1748606354" name="TextBox 8"/>
+          <p:cNvPr id="1076393900" name="TextBox 8"/>
           <p:cNvSpPr txBox="1"/>
           <p:nvPr/>
         </p:nvSpPr>
@@ -5965,14 +5927,14 @@
       </p:sp>
       <p:sp>
         <p:nvSpPr>
-          <p:cNvPr id="504775741" name="TextBox 9"/>
+          <p:cNvPr id="211684969" name="TextBox 9"/>
           <p:cNvSpPr txBox="1"/>
           <p:nvPr/>
         </p:nvSpPr>
         <p:spPr bwMode="auto">
           <a:xfrm>
             <a:off x="457200" y="6446520"/>
-            <a:ext cx="7315200" cy="320040"/>
+            <a:ext cx="7318079" cy="137519"/>
           </a:xfrm>
           <a:prstGeom prst="rect">
             <a:avLst/>
@@ -5995,15 +5957,15 @@
                 </a:solidFill>
                 <a:latin typeface="Segoe UI"/>
               </a:rPr>
-              <a:t>Project 7 — SOC Security Operations Copilot  —  Soliman</a:t>
-            </a:r>
-            <a:endParaRPr/>
-          </a:p>
-        </p:txBody>
-      </p:sp>
-      <p:sp>
-        <p:nvSpPr>
-          <p:cNvPr id="1966692735" name="TextBox 10"/>
+              <a:t>Project 7 — SOC Security Operations Copilot  —  Mohamed Soliman</a:t>
+            </a:r>
+            <a:endParaRPr/>
+          </a:p>
+        </p:txBody>
+      </p:sp>
+      <p:sp>
+        <p:nvSpPr>
+          <p:cNvPr id="1636652382" name="TextBox 10"/>
           <p:cNvSpPr txBox="1"/>
           <p:nvPr/>
         </p:nvSpPr>
@@ -6074,7 +6036,7 @@
       </p:grpSpPr>
       <p:sp>
         <p:nvSpPr>
-          <p:cNvPr id="664312773" name="TextBox 1"/>
+          <p:cNvPr id="692390667" name="TextBox 1"/>
           <p:cNvSpPr txBox="1"/>
           <p:nvPr/>
         </p:nvSpPr>
@@ -6112,7 +6074,7 @@
       </p:sp>
       <p:sp>
         <p:nvSpPr>
-          <p:cNvPr id="1848506009" name="TextBox 2"/>
+          <p:cNvPr id="795412939" name="TextBox 2"/>
           <p:cNvSpPr txBox="1"/>
           <p:nvPr/>
         </p:nvSpPr>
@@ -6150,7 +6112,7 @@
       </p:sp>
       <p:sp>
         <p:nvSpPr>
-          <p:cNvPr id="1240010211" name="TextBox 3"/>
+          <p:cNvPr id="1062044338" name="TextBox 3"/>
           <p:cNvSpPr txBox="1"/>
           <p:nvPr/>
         </p:nvSpPr>
@@ -6188,7 +6150,7 @@
       </p:sp>
       <p:sp>
         <p:nvSpPr>
-          <p:cNvPr id="840458757" name="Rectangle 4"/>
+          <p:cNvPr id="569281559" name="Rectangle 4"/>
           <p:cNvSpPr/>
           <p:nvPr/>
         </p:nvSpPr>
@@ -6235,7 +6197,7 @@
       </p:sp>
       <p:sp>
         <p:nvSpPr>
-          <p:cNvPr id="2043583711" name="Rectangle 5"/>
+          <p:cNvPr id="1427093956" name="Rectangle 5"/>
           <p:cNvSpPr/>
           <p:nvPr/>
         </p:nvSpPr>
@@ -6284,7 +6246,7 @@
       </p:sp>
       <p:sp>
         <p:nvSpPr>
-          <p:cNvPr id="366536963" name="TextBox 6"/>
+          <p:cNvPr id="1239025027" name="TextBox 6"/>
           <p:cNvSpPr txBox="1"/>
           <p:nvPr/>
         </p:nvSpPr>
@@ -6322,7 +6284,7 @@
       </p:sp>
       <p:sp>
         <p:nvSpPr>
-          <p:cNvPr id="833338964" name="TextBox 7"/>
+          <p:cNvPr id="1827734335" name="TextBox 7"/>
           <p:cNvSpPr txBox="1"/>
           <p:nvPr/>
         </p:nvSpPr>
@@ -6375,7 +6337,7 @@
       </p:sp>
       <p:sp>
         <p:nvSpPr>
-          <p:cNvPr id="1091385483" name="TextBox 8"/>
+          <p:cNvPr id="896238531" name="TextBox 8"/>
           <p:cNvSpPr txBox="1"/>
           <p:nvPr/>
         </p:nvSpPr>
@@ -6413,7 +6375,7 @@
       </p:sp>
       <p:sp>
         <p:nvSpPr>
-          <p:cNvPr id="93481626" name="Rectangle 9"/>
+          <p:cNvPr id="1001626546" name="Rectangle 9"/>
           <p:cNvSpPr/>
           <p:nvPr/>
         </p:nvSpPr>
@@ -6462,7 +6424,7 @@
       </p:sp>
       <p:sp>
         <p:nvSpPr>
-          <p:cNvPr id="772409221" name="TextBox 10"/>
+          <p:cNvPr id="216247455" name="TextBox 10"/>
           <p:cNvSpPr txBox="1"/>
           <p:nvPr/>
         </p:nvSpPr>
@@ -6500,7 +6462,7 @@
       </p:sp>
       <p:sp>
         <p:nvSpPr>
-          <p:cNvPr id="1637213710" name="TextBox 11"/>
+          <p:cNvPr id="1944464620" name="TextBox 11"/>
           <p:cNvSpPr txBox="1"/>
           <p:nvPr/>
         </p:nvSpPr>
@@ -6553,7 +6515,7 @@
       </p:sp>
       <p:sp>
         <p:nvSpPr>
-          <p:cNvPr id="1518987849" name="TextBox 12"/>
+          <p:cNvPr id="2016878703" name="TextBox 12"/>
           <p:cNvSpPr txBox="1"/>
           <p:nvPr/>
         </p:nvSpPr>
@@ -6591,7 +6553,7 @@
       </p:sp>
       <p:sp>
         <p:nvSpPr>
-          <p:cNvPr id="1506214825" name="Rectangle 13"/>
+          <p:cNvPr id="2074487432" name="Rectangle 13"/>
           <p:cNvSpPr/>
           <p:nvPr/>
         </p:nvSpPr>
@@ -6640,7 +6602,7 @@
       </p:sp>
       <p:sp>
         <p:nvSpPr>
-          <p:cNvPr id="149525161" name="TextBox 14"/>
+          <p:cNvPr id="1090719023" name="TextBox 14"/>
           <p:cNvSpPr txBox="1"/>
           <p:nvPr/>
         </p:nvSpPr>
@@ -6678,7 +6640,7 @@
       </p:sp>
       <p:sp>
         <p:nvSpPr>
-          <p:cNvPr id="1370182103" name="TextBox 15"/>
+          <p:cNvPr id="1745321799" name="TextBox 15"/>
           <p:cNvSpPr txBox="1"/>
           <p:nvPr/>
         </p:nvSpPr>
@@ -6731,7 +6693,7 @@
       </p:sp>
       <p:sp>
         <p:nvSpPr>
-          <p:cNvPr id="1132924213" name="TextBox 16"/>
+          <p:cNvPr id="348347356" name="TextBox 16"/>
           <p:cNvSpPr txBox="1"/>
           <p:nvPr/>
         </p:nvSpPr>
@@ -6769,7 +6731,7 @@
       </p:sp>
       <p:sp>
         <p:nvSpPr>
-          <p:cNvPr id="774620665" name="Rectangle 17"/>
+          <p:cNvPr id="1863297148" name="Rectangle 17"/>
           <p:cNvSpPr/>
           <p:nvPr/>
         </p:nvSpPr>
@@ -6818,7 +6780,7 @@
       </p:sp>
       <p:sp>
         <p:nvSpPr>
-          <p:cNvPr id="783649747" name="TextBox 18"/>
+          <p:cNvPr id="1747523318" name="TextBox 18"/>
           <p:cNvSpPr txBox="1"/>
           <p:nvPr/>
         </p:nvSpPr>
@@ -6856,7 +6818,7 @@
       </p:sp>
       <p:sp>
         <p:nvSpPr>
-          <p:cNvPr id="679853015" name="TextBox 19"/>
+          <p:cNvPr id="398128658" name="TextBox 19"/>
           <p:cNvSpPr txBox="1"/>
           <p:nvPr/>
         </p:nvSpPr>
@@ -6909,7 +6871,7 @@
       </p:sp>
       <p:sp>
         <p:nvSpPr>
-          <p:cNvPr id="1912185653" name="TextBox 20"/>
+          <p:cNvPr id="1493393894" name="TextBox 20"/>
           <p:cNvSpPr txBox="1"/>
           <p:nvPr/>
         </p:nvSpPr>
@@ -6947,7 +6909,7 @@
       </p:sp>
       <p:sp>
         <p:nvSpPr>
-          <p:cNvPr id="1637953920" name="Rectangle 21"/>
+          <p:cNvPr id="2052777542" name="Rectangle 21"/>
           <p:cNvSpPr/>
           <p:nvPr/>
         </p:nvSpPr>
@@ -6996,7 +6958,7 @@
       </p:sp>
       <p:sp>
         <p:nvSpPr>
-          <p:cNvPr id="1053092466" name="TextBox 22"/>
+          <p:cNvPr id="420303214" name="TextBox 22"/>
           <p:cNvSpPr txBox="1"/>
           <p:nvPr/>
         </p:nvSpPr>
@@ -7034,7 +6996,7 @@
       </p:sp>
       <p:sp>
         <p:nvSpPr>
-          <p:cNvPr id="1181311512" name="TextBox 23"/>
+          <p:cNvPr id="1153372957" name="TextBox 23"/>
           <p:cNvSpPr txBox="1"/>
           <p:nvPr/>
         </p:nvSpPr>
@@ -7087,7 +7049,7 @@
       </p:sp>
       <p:sp>
         <p:nvSpPr>
-          <p:cNvPr id="355641794" name="TextBox 24"/>
+          <p:cNvPr id="1058459125" name="TextBox 24"/>
           <p:cNvSpPr txBox="1"/>
           <p:nvPr/>
         </p:nvSpPr>
@@ -7173,14 +7135,14 @@
       </p:sp>
       <p:sp>
         <p:nvSpPr>
-          <p:cNvPr id="251790920" name="TextBox 25"/>
+          <p:cNvPr id="1112448900" name="TextBox 25"/>
           <p:cNvSpPr txBox="1"/>
           <p:nvPr/>
         </p:nvSpPr>
         <p:spPr bwMode="auto">
           <a:xfrm>
             <a:off x="457200" y="6446520"/>
-            <a:ext cx="7315200" cy="320040"/>
+            <a:ext cx="7315919" cy="411839"/>
           </a:xfrm>
           <a:prstGeom prst="rect">
             <a:avLst/>
@@ -7197,21 +7159,29 @@
               <a:defRPr/>
             </a:pPr>
             <a:r>
-              <a:rPr sz="900" b="0" i="0">
+              <a:rPr lang="en-US" sz="900" b="0" i="0" u="none" strike="noStrike" cap="none" spc="0">
                 <a:solidFill>
                   <a:srgbClr val="555555"/>
                 </a:solidFill>
                 <a:latin typeface="Segoe UI"/>
-              </a:rPr>
-              <a:t>Project 7 — SOC Security Operations Copilot  —  Soliman</a:t>
-            </a:r>
-            <a:endParaRPr/>
-          </a:p>
-        </p:txBody>
-      </p:sp>
-      <p:sp>
-        <p:nvSpPr>
-          <p:cNvPr id="959269664" name="TextBox 26"/>
+                <a:ea typeface="Segoe UI"/>
+                <a:cs typeface="Segoe UI"/>
+              </a:rPr>
+              <a:t>Project 7 — SOC Security Operations Copilot  —  Mohamed Soliman</a:t>
+            </a:r>
+            <a:endParaRPr sz="900"/>
+          </a:p>
+          <a:p>
+            <a:pPr>
+              <a:defRPr/>
+            </a:pPr>
+            <a:endParaRPr/>
+          </a:p>
+        </p:txBody>
+      </p:sp>
+      <p:sp>
+        <p:nvSpPr>
+          <p:cNvPr id="298881740" name="TextBox 26"/>
           <p:cNvSpPr txBox="1"/>
           <p:nvPr/>
         </p:nvSpPr>
@@ -7282,7 +7252,7 @@
       </p:grpSpPr>
       <p:sp>
         <p:nvSpPr>
-          <p:cNvPr id="1259155057" name="TextBox 1"/>
+          <p:cNvPr id="1065422842" name="TextBox 1"/>
           <p:cNvSpPr txBox="1"/>
           <p:nvPr/>
         </p:nvSpPr>
@@ -7320,7 +7290,7 @@
       </p:sp>
       <p:sp>
         <p:nvSpPr>
-          <p:cNvPr id="952784167" name="TextBox 2"/>
+          <p:cNvPr id="598299797" name="TextBox 2"/>
           <p:cNvSpPr txBox="1"/>
           <p:nvPr/>
         </p:nvSpPr>
@@ -7358,7 +7328,7 @@
       </p:sp>
       <p:sp>
         <p:nvSpPr>
-          <p:cNvPr id="279116766" name="TextBox 3"/>
+          <p:cNvPr id="1739538756" name="TextBox 3"/>
           <p:cNvSpPr txBox="1"/>
           <p:nvPr/>
         </p:nvSpPr>
@@ -7396,7 +7366,7 @@
       </p:sp>
       <p:sp>
         <p:nvSpPr>
-          <p:cNvPr id="1951825719" name="Rectangle 4"/>
+          <p:cNvPr id="1422649283" name="Rectangle 4"/>
           <p:cNvSpPr/>
           <p:nvPr/>
         </p:nvSpPr>
@@ -7443,7 +7413,7 @@
       </p:sp>
       <p:pic>
         <p:nvPicPr>
-          <p:cNvPr id="1469573777" name="Picture 5" descr="agent_graph.png"/>
+          <p:cNvPr id="1722281863" name="Picture 5" descr="agent_graph.png"/>
           <p:cNvPicPr>
             <a:picLocks noChangeAspect="1"/>
           </p:cNvPicPr>
@@ -7465,7 +7435,7 @@
       </p:pic>
       <p:sp>
         <p:nvSpPr>
-          <p:cNvPr id="862546915" name="TextBox 6"/>
+          <p:cNvPr id="852926271" name="TextBox 6"/>
           <p:cNvSpPr txBox="1"/>
           <p:nvPr/>
         </p:nvSpPr>
@@ -7509,14 +7479,14 @@
       </p:sp>
       <p:sp>
         <p:nvSpPr>
-          <p:cNvPr id="700518751" name="TextBox 7"/>
+          <p:cNvPr id="81217923" name="TextBox 7"/>
           <p:cNvSpPr txBox="1"/>
           <p:nvPr/>
         </p:nvSpPr>
         <p:spPr bwMode="auto">
           <a:xfrm>
             <a:off x="457200" y="6446520"/>
-            <a:ext cx="7315200" cy="320040"/>
+            <a:ext cx="7315919" cy="411839"/>
           </a:xfrm>
           <a:prstGeom prst="rect">
             <a:avLst/>
@@ -7533,21 +7503,29 @@
               <a:defRPr/>
             </a:pPr>
             <a:r>
-              <a:rPr sz="900" b="0" i="0">
+              <a:rPr lang="en-US" sz="900" b="0" i="0" u="none" strike="noStrike" cap="none" spc="0">
                 <a:solidFill>
                   <a:srgbClr val="555555"/>
                 </a:solidFill>
                 <a:latin typeface="Segoe UI"/>
-              </a:rPr>
-              <a:t>Project 7 — SOC Security Operations Copilot  —  Soliman</a:t>
-            </a:r>
-            <a:endParaRPr/>
-          </a:p>
-        </p:txBody>
-      </p:sp>
-      <p:sp>
-        <p:nvSpPr>
-          <p:cNvPr id="2124417864" name="TextBox 8"/>
+                <a:ea typeface="Segoe UI"/>
+                <a:cs typeface="Segoe UI"/>
+              </a:rPr>
+              <a:t>Project 7 — SOC Security Operations Copilot  —  Mohamed Soliman</a:t>
+            </a:r>
+            <a:endParaRPr sz="900"/>
+          </a:p>
+          <a:p>
+            <a:pPr>
+              <a:defRPr/>
+            </a:pPr>
+            <a:endParaRPr/>
+          </a:p>
+        </p:txBody>
+      </p:sp>
+      <p:sp>
+        <p:nvSpPr>
+          <p:cNvPr id="1727664382" name="TextBox 8"/>
           <p:cNvSpPr txBox="1"/>
           <p:nvPr/>
         </p:nvSpPr>
@@ -7618,7 +7596,7 @@
       </p:grpSpPr>
       <p:sp>
         <p:nvSpPr>
-          <p:cNvPr id="189924933" name="TextBox 1"/>
+          <p:cNvPr id="929748807" name="TextBox 1"/>
           <p:cNvSpPr txBox="1"/>
           <p:nvPr/>
         </p:nvSpPr>
@@ -7656,7 +7634,7 @@
       </p:sp>
       <p:sp>
         <p:nvSpPr>
-          <p:cNvPr id="190246599" name="TextBox 2"/>
+          <p:cNvPr id="1820234055" name="TextBox 2"/>
           <p:cNvSpPr txBox="1"/>
           <p:nvPr/>
         </p:nvSpPr>
@@ -7694,7 +7672,7 @@
       </p:sp>
       <p:sp>
         <p:nvSpPr>
-          <p:cNvPr id="1740146326" name="TextBox 3"/>
+          <p:cNvPr id="998136728" name="TextBox 3"/>
           <p:cNvSpPr txBox="1"/>
           <p:nvPr/>
         </p:nvSpPr>
@@ -7732,7 +7710,7 @@
       </p:sp>
       <p:sp>
         <p:nvSpPr>
-          <p:cNvPr id="548058103" name="Rectangle 4"/>
+          <p:cNvPr id="819114802" name="Rectangle 4"/>
           <p:cNvSpPr/>
           <p:nvPr/>
         </p:nvSpPr>
@@ -7779,7 +7757,7 @@
       </p:sp>
       <p:graphicFrame>
         <p:nvGraphicFramePr>
-          <p:cNvPr id="276806420" name="Table 5"/>
+          <p:cNvPr id="15989634" name="Table 5"/>
           <p:cNvGraphicFramePr>
             <a:graphicFrameLocks xmlns:a="http://schemas.openxmlformats.org/drawingml/2006/main" noGrp="1"/>
           </p:cNvGraphicFramePr>
@@ -8268,7 +8246,7 @@
       </p:graphicFrame>
       <p:sp>
         <p:nvSpPr>
-          <p:cNvPr id="888914649" name="TextBox 6"/>
+          <p:cNvPr id="357031893" name="TextBox 6"/>
           <p:cNvSpPr txBox="1"/>
           <p:nvPr/>
         </p:nvSpPr>
@@ -8306,14 +8284,14 @@
       </p:sp>
       <p:sp>
         <p:nvSpPr>
-          <p:cNvPr id="718469941" name="TextBox 7"/>
+          <p:cNvPr id="259541078" name="TextBox 7"/>
           <p:cNvSpPr txBox="1"/>
           <p:nvPr/>
         </p:nvSpPr>
         <p:spPr bwMode="auto">
           <a:xfrm>
             <a:off x="457200" y="6446520"/>
-            <a:ext cx="7315200" cy="320040"/>
+            <a:ext cx="7315919" cy="411839"/>
           </a:xfrm>
           <a:prstGeom prst="rect">
             <a:avLst/>
@@ -8330,21 +8308,29 @@
               <a:defRPr/>
             </a:pPr>
             <a:r>
-              <a:rPr sz="900" b="0" i="0">
+              <a:rPr lang="en-US" sz="900" b="0" i="0" u="none" strike="noStrike" cap="none" spc="0">
                 <a:solidFill>
                   <a:srgbClr val="555555"/>
                 </a:solidFill>
                 <a:latin typeface="Segoe UI"/>
-              </a:rPr>
-              <a:t>Project 7 — SOC Security Operations Copilot  —  Soliman</a:t>
-            </a:r>
-            <a:endParaRPr/>
-          </a:p>
-        </p:txBody>
-      </p:sp>
-      <p:sp>
-        <p:nvSpPr>
-          <p:cNvPr id="55712196" name="TextBox 8"/>
+                <a:ea typeface="Segoe UI"/>
+                <a:cs typeface="Segoe UI"/>
+              </a:rPr>
+              <a:t>Project 7 — SOC Security Operations Copilot  —  Mohamed Soliman</a:t>
+            </a:r>
+            <a:endParaRPr sz="900"/>
+          </a:p>
+          <a:p>
+            <a:pPr>
+              <a:defRPr/>
+            </a:pPr>
+            <a:endParaRPr/>
+          </a:p>
+        </p:txBody>
+      </p:sp>
+      <p:sp>
+        <p:nvSpPr>
+          <p:cNvPr id="1223555911" name="TextBox 8"/>
           <p:cNvSpPr txBox="1"/>
           <p:nvPr/>
         </p:nvSpPr>
@@ -8415,7 +8401,7 @@
       </p:grpSpPr>
       <p:sp>
         <p:nvSpPr>
-          <p:cNvPr id="563397137" name="TextBox 1"/>
+          <p:cNvPr id="534863048" name="TextBox 1"/>
           <p:cNvSpPr txBox="1"/>
           <p:nvPr/>
         </p:nvSpPr>
@@ -8453,7 +8439,7 @@
       </p:sp>
       <p:sp>
         <p:nvSpPr>
-          <p:cNvPr id="155104008" name="TextBox 2"/>
+          <p:cNvPr id="1070385108" name="TextBox 2"/>
           <p:cNvSpPr txBox="1"/>
           <p:nvPr/>
         </p:nvSpPr>
@@ -8491,7 +8477,7 @@
       </p:sp>
       <p:sp>
         <p:nvSpPr>
-          <p:cNvPr id="2095145573" name="TextBox 3"/>
+          <p:cNvPr id="533030763" name="TextBox 3"/>
           <p:cNvSpPr txBox="1"/>
           <p:nvPr/>
         </p:nvSpPr>
@@ -8529,7 +8515,7 @@
       </p:sp>
       <p:sp>
         <p:nvSpPr>
-          <p:cNvPr id="322765854" name="Rectangle 4"/>
+          <p:cNvPr id="934546212" name="Rectangle 4"/>
           <p:cNvSpPr/>
           <p:nvPr/>
         </p:nvSpPr>
@@ -8576,7 +8562,7 @@
       </p:sp>
       <p:sp>
         <p:nvSpPr>
-          <p:cNvPr id="907859804" name="Rectangle 5"/>
+          <p:cNvPr id="578169147" name="Rectangle 5"/>
           <p:cNvSpPr/>
           <p:nvPr/>
         </p:nvSpPr>
@@ -8625,7 +8611,7 @@
       </p:sp>
       <p:sp>
         <p:nvSpPr>
-          <p:cNvPr id="1435833779" name="TextBox 6"/>
+          <p:cNvPr id="605711337" name="TextBox 6"/>
           <p:cNvSpPr txBox="1"/>
           <p:nvPr/>
         </p:nvSpPr>
@@ -8663,7 +8649,7 @@
       </p:sp>
       <p:sp>
         <p:nvSpPr>
-          <p:cNvPr id="2038832779" name="TextBox 7"/>
+          <p:cNvPr id="1585282237" name="TextBox 7"/>
           <p:cNvSpPr txBox="1"/>
           <p:nvPr/>
         </p:nvSpPr>
@@ -8701,7 +8687,7 @@
       </p:sp>
       <p:sp>
         <p:nvSpPr>
-          <p:cNvPr id="837489029" name="TextBox 8"/>
+          <p:cNvPr id="363333899" name="TextBox 8"/>
           <p:cNvSpPr txBox="1"/>
           <p:nvPr/>
         </p:nvSpPr>
@@ -8739,7 +8725,7 @@
       </p:sp>
       <p:sp>
         <p:nvSpPr>
-          <p:cNvPr id="2090805534" name="Rectangle 9"/>
+          <p:cNvPr id="1694941891" name="Rectangle 9"/>
           <p:cNvSpPr/>
           <p:nvPr/>
         </p:nvSpPr>
@@ -8788,7 +8774,7 @@
       </p:sp>
       <p:sp>
         <p:nvSpPr>
-          <p:cNvPr id="2055243320" name="TextBox 10"/>
+          <p:cNvPr id="375244629" name="TextBox 10"/>
           <p:cNvSpPr txBox="1"/>
           <p:nvPr/>
         </p:nvSpPr>
@@ -8826,7 +8812,7 @@
       </p:sp>
       <p:sp>
         <p:nvSpPr>
-          <p:cNvPr id="103537438" name="TextBox 11"/>
+          <p:cNvPr id="1714191355" name="TextBox 11"/>
           <p:cNvSpPr txBox="1"/>
           <p:nvPr/>
         </p:nvSpPr>
@@ -8864,7 +8850,7 @@
       </p:sp>
       <p:sp>
         <p:nvSpPr>
-          <p:cNvPr id="213872977" name="TextBox 12"/>
+          <p:cNvPr id="1634531182" name="TextBox 12"/>
           <p:cNvSpPr txBox="1"/>
           <p:nvPr/>
         </p:nvSpPr>
@@ -8902,7 +8888,7 @@
       </p:sp>
       <p:sp>
         <p:nvSpPr>
-          <p:cNvPr id="127813888" name="Rectangle 13"/>
+          <p:cNvPr id="999581230" name="Rectangle 13"/>
           <p:cNvSpPr/>
           <p:nvPr/>
         </p:nvSpPr>
@@ -8951,7 +8937,7 @@
       </p:sp>
       <p:sp>
         <p:nvSpPr>
-          <p:cNvPr id="470184687" name="TextBox 14"/>
+          <p:cNvPr id="1155342229" name="TextBox 14"/>
           <p:cNvSpPr txBox="1"/>
           <p:nvPr/>
         </p:nvSpPr>
@@ -8989,7 +8975,7 @@
       </p:sp>
       <p:sp>
         <p:nvSpPr>
-          <p:cNvPr id="637137387" name="TextBox 15"/>
+          <p:cNvPr id="1191761150" name="TextBox 15"/>
           <p:cNvSpPr txBox="1"/>
           <p:nvPr/>
         </p:nvSpPr>
@@ -9027,7 +9013,7 @@
       </p:sp>
       <p:sp>
         <p:nvSpPr>
-          <p:cNvPr id="265318294" name="TextBox 16"/>
+          <p:cNvPr id="1788135735" name="TextBox 16"/>
           <p:cNvSpPr txBox="1"/>
           <p:nvPr/>
         </p:nvSpPr>
@@ -9065,14 +9051,14 @@
       </p:sp>
       <p:sp>
         <p:nvSpPr>
-          <p:cNvPr id="1355483400" name="TextBox 17"/>
+          <p:cNvPr id="1420554782" name="TextBox 17"/>
           <p:cNvSpPr txBox="1"/>
           <p:nvPr/>
         </p:nvSpPr>
         <p:spPr bwMode="auto">
           <a:xfrm>
             <a:off x="457200" y="6446520"/>
-            <a:ext cx="7315200" cy="320040"/>
+            <a:ext cx="7315919" cy="411839"/>
           </a:xfrm>
           <a:prstGeom prst="rect">
             <a:avLst/>
@@ -9089,21 +9075,29 @@
               <a:defRPr/>
             </a:pPr>
             <a:r>
-              <a:rPr sz="900" b="0" i="0">
+              <a:rPr lang="en-US" sz="900" b="0" i="0" u="none" strike="noStrike" cap="none" spc="0">
                 <a:solidFill>
                   <a:srgbClr val="555555"/>
                 </a:solidFill>
                 <a:latin typeface="Segoe UI"/>
-              </a:rPr>
-              <a:t>Project 7 — SOC Security Operations Copilot  —  Soliman</a:t>
-            </a:r>
-            <a:endParaRPr/>
-          </a:p>
-        </p:txBody>
-      </p:sp>
-      <p:sp>
-        <p:nvSpPr>
-          <p:cNvPr id="653997997" name="TextBox 18"/>
+                <a:ea typeface="Segoe UI"/>
+                <a:cs typeface="Segoe UI"/>
+              </a:rPr>
+              <a:t>Project 7 — SOC Security Operations Copilot  —  Mohamed Soliman</a:t>
+            </a:r>
+            <a:endParaRPr sz="900"/>
+          </a:p>
+          <a:p>
+            <a:pPr>
+              <a:defRPr/>
+            </a:pPr>
+            <a:endParaRPr/>
+          </a:p>
+        </p:txBody>
+      </p:sp>
+      <p:sp>
+        <p:nvSpPr>
+          <p:cNvPr id="1823650457" name="TextBox 18"/>
           <p:cNvSpPr txBox="1"/>
           <p:nvPr/>
         </p:nvSpPr>
@@ -9174,7 +9168,7 @@
       </p:grpSpPr>
       <p:sp>
         <p:nvSpPr>
-          <p:cNvPr id="2134341532" name="TextBox 1"/>
+          <p:cNvPr id="250787159" name="TextBox 1"/>
           <p:cNvSpPr txBox="1"/>
           <p:nvPr/>
         </p:nvSpPr>
@@ -9212,7 +9206,7 @@
       </p:sp>
       <p:sp>
         <p:nvSpPr>
-          <p:cNvPr id="2144540564" name="TextBox 2"/>
+          <p:cNvPr id="238265774" name="TextBox 2"/>
           <p:cNvSpPr txBox="1"/>
           <p:nvPr/>
         </p:nvSpPr>
@@ -9250,7 +9244,7 @@
       </p:sp>
       <p:sp>
         <p:nvSpPr>
-          <p:cNvPr id="1026390071" name="TextBox 3"/>
+          <p:cNvPr id="1014664642" name="TextBox 3"/>
           <p:cNvSpPr txBox="1"/>
           <p:nvPr/>
         </p:nvSpPr>
@@ -9288,7 +9282,7 @@
       </p:sp>
       <p:sp>
         <p:nvSpPr>
-          <p:cNvPr id="1794606984" name="Rectangle 4"/>
+          <p:cNvPr id="1000946948" name="Rectangle 4"/>
           <p:cNvSpPr/>
           <p:nvPr/>
         </p:nvSpPr>
@@ -9335,7 +9329,7 @@
       </p:sp>
       <p:graphicFrame>
         <p:nvGraphicFramePr>
-          <p:cNvPr id="1665888249" name="Table 5"/>
+          <p:cNvPr id="630266364" name="Table 5"/>
           <p:cNvGraphicFramePr>
             <a:graphicFrameLocks xmlns:a="http://schemas.openxmlformats.org/drawingml/2006/main" noGrp="1"/>
           </p:cNvGraphicFramePr>
@@ -9747,7 +9741,7 @@
       </p:graphicFrame>
       <p:sp>
         <p:nvSpPr>
-          <p:cNvPr id="798505151" name="TextBox 6"/>
+          <p:cNvPr id="598555150" name="TextBox 6"/>
           <p:cNvSpPr txBox="1"/>
           <p:nvPr/>
         </p:nvSpPr>
@@ -9785,14 +9779,14 @@
       </p:sp>
       <p:sp>
         <p:nvSpPr>
-          <p:cNvPr id="1984250866" name="TextBox 7"/>
+          <p:cNvPr id="810604046" name="TextBox 7"/>
           <p:cNvSpPr txBox="1"/>
           <p:nvPr/>
         </p:nvSpPr>
         <p:spPr bwMode="auto">
           <a:xfrm>
             <a:off x="457200" y="6446520"/>
-            <a:ext cx="7315200" cy="320040"/>
+            <a:ext cx="7315919" cy="411839"/>
           </a:xfrm>
           <a:prstGeom prst="rect">
             <a:avLst/>
@@ -9809,21 +9803,29 @@
               <a:defRPr/>
             </a:pPr>
             <a:r>
-              <a:rPr sz="900" b="0" i="0">
+              <a:rPr lang="en-US" sz="900" b="0" i="0" u="none" strike="noStrike" cap="none" spc="0">
                 <a:solidFill>
                   <a:srgbClr val="555555"/>
                 </a:solidFill>
                 <a:latin typeface="Segoe UI"/>
-              </a:rPr>
-              <a:t>Project 7 — SOC Security Operations Copilot  —  Soliman</a:t>
-            </a:r>
-            <a:endParaRPr/>
-          </a:p>
-        </p:txBody>
-      </p:sp>
-      <p:sp>
-        <p:nvSpPr>
-          <p:cNvPr id="909211111" name="TextBox 8"/>
+                <a:ea typeface="Segoe UI"/>
+                <a:cs typeface="Segoe UI"/>
+              </a:rPr>
+              <a:t>Project 7 — SOC Security Operations Copilot  —  Mohamed Soliman</a:t>
+            </a:r>
+            <a:endParaRPr sz="900"/>
+          </a:p>
+          <a:p>
+            <a:pPr>
+              <a:defRPr/>
+            </a:pPr>
+            <a:endParaRPr/>
+          </a:p>
+        </p:txBody>
+      </p:sp>
+      <p:sp>
+        <p:nvSpPr>
+          <p:cNvPr id="1224700183" name="TextBox 8"/>
           <p:cNvSpPr txBox="1"/>
           <p:nvPr/>
         </p:nvSpPr>
@@ -9894,7 +9896,7 @@
       </p:grpSpPr>
       <p:sp>
         <p:nvSpPr>
-          <p:cNvPr id="1285643825" name="TextBox 1"/>
+          <p:cNvPr id="719446379" name="TextBox 1"/>
           <p:cNvSpPr txBox="1"/>
           <p:nvPr/>
         </p:nvSpPr>
@@ -9932,7 +9934,7 @@
       </p:sp>
       <p:sp>
         <p:nvSpPr>
-          <p:cNvPr id="338130464" name="TextBox 2"/>
+          <p:cNvPr id="266781175" name="TextBox 2"/>
           <p:cNvSpPr txBox="1"/>
           <p:nvPr/>
         </p:nvSpPr>
@@ -9970,7 +9972,7 @@
       </p:sp>
       <p:sp>
         <p:nvSpPr>
-          <p:cNvPr id="1705977453" name="TextBox 3"/>
+          <p:cNvPr id="1752813254" name="TextBox 3"/>
           <p:cNvSpPr txBox="1"/>
           <p:nvPr/>
         </p:nvSpPr>
@@ -10008,7 +10010,7 @@
       </p:sp>
       <p:sp>
         <p:nvSpPr>
-          <p:cNvPr id="902184202" name="Rectangle 4"/>
+          <p:cNvPr id="1596040110" name="Rectangle 4"/>
           <p:cNvSpPr/>
           <p:nvPr/>
         </p:nvSpPr>
@@ -10055,7 +10057,7 @@
       </p:sp>
       <p:sp>
         <p:nvSpPr>
-          <p:cNvPr id="89579030" name="TextBox 5"/>
+          <p:cNvPr id="190320006" name="TextBox 5"/>
           <p:cNvSpPr txBox="1"/>
           <p:nvPr/>
         </p:nvSpPr>
@@ -10093,7 +10095,7 @@
       </p:sp>
       <p:sp>
         <p:nvSpPr>
-          <p:cNvPr id="2110528473" name="TextBox 6"/>
+          <p:cNvPr id="1831709024" name="TextBox 6"/>
           <p:cNvSpPr txBox="1"/>
           <p:nvPr/>
         </p:nvSpPr>
@@ -10221,7 +10223,7 @@
       </p:sp>
       <p:sp>
         <p:nvSpPr>
-          <p:cNvPr id="835626986" name="TextBox 7"/>
+          <p:cNvPr id="1241494256" name="TextBox 7"/>
           <p:cNvSpPr txBox="1"/>
           <p:nvPr/>
         </p:nvSpPr>
@@ -10259,7 +10261,7 @@
       </p:sp>
       <p:sp>
         <p:nvSpPr>
-          <p:cNvPr id="1483895242" name="TextBox 8"/>
+          <p:cNvPr id="1853251187" name="TextBox 8"/>
           <p:cNvSpPr txBox="1"/>
           <p:nvPr/>
         </p:nvSpPr>
@@ -10387,7 +10389,7 @@
       </p:sp>
       <p:sp>
         <p:nvSpPr>
-          <p:cNvPr id="1079659675" name="Rectangle 9"/>
+          <p:cNvPr id="71956855" name="Rectangle 9"/>
           <p:cNvSpPr/>
           <p:nvPr/>
         </p:nvSpPr>
@@ -10436,7 +10438,7 @@
       </p:sp>
       <p:sp>
         <p:nvSpPr>
-          <p:cNvPr id="73045573" name="TextBox 10"/>
+          <p:cNvPr id="1142359469" name="TextBox 10"/>
           <p:cNvSpPr txBox="1"/>
           <p:nvPr/>
         </p:nvSpPr>
@@ -10474,14 +10476,14 @@
       </p:sp>
       <p:sp>
         <p:nvSpPr>
-          <p:cNvPr id="1133584015" name="TextBox 11"/>
+          <p:cNvPr id="1544604160" name="TextBox 11"/>
           <p:cNvSpPr txBox="1"/>
           <p:nvPr/>
         </p:nvSpPr>
         <p:spPr bwMode="auto">
           <a:xfrm>
             <a:off x="457200" y="6446520"/>
-            <a:ext cx="7315200" cy="320040"/>
+            <a:ext cx="7315919" cy="411839"/>
           </a:xfrm>
           <a:prstGeom prst="rect">
             <a:avLst/>
@@ -10498,21 +10500,29 @@
               <a:defRPr/>
             </a:pPr>
             <a:r>
-              <a:rPr sz="900" b="0" i="0">
+              <a:rPr lang="en-US" sz="900" b="0" i="0" u="none" strike="noStrike" cap="none" spc="0">
                 <a:solidFill>
                   <a:srgbClr val="555555"/>
                 </a:solidFill>
                 <a:latin typeface="Segoe UI"/>
-              </a:rPr>
-              <a:t>Project 7 — SOC Security Operations Copilot  —  Soliman</a:t>
-            </a:r>
-            <a:endParaRPr/>
-          </a:p>
-        </p:txBody>
-      </p:sp>
-      <p:sp>
-        <p:nvSpPr>
-          <p:cNvPr id="221315943" name="TextBox 12"/>
+                <a:ea typeface="Segoe UI"/>
+                <a:cs typeface="Segoe UI"/>
+              </a:rPr>
+              <a:t>Project 7 — SOC Security Operations Copilot  —  Mohamed Soliman</a:t>
+            </a:r>
+            <a:endParaRPr sz="900"/>
+          </a:p>
+          <a:p>
+            <a:pPr>
+              <a:defRPr/>
+            </a:pPr>
+            <a:endParaRPr/>
+          </a:p>
+        </p:txBody>
+      </p:sp>
+      <p:sp>
+        <p:nvSpPr>
+          <p:cNvPr id="1076388481" name="TextBox 12"/>
           <p:cNvSpPr txBox="1"/>
           <p:nvPr/>
         </p:nvSpPr>
@@ -10583,7 +10593,7 @@
       </p:grpSpPr>
       <p:sp>
         <p:nvSpPr>
-          <p:cNvPr id="1388246188" name="TextBox 1"/>
+          <p:cNvPr id="2031514389" name="TextBox 1"/>
           <p:cNvSpPr txBox="1"/>
           <p:nvPr/>
         </p:nvSpPr>
@@ -10621,7 +10631,7 @@
       </p:sp>
       <p:sp>
         <p:nvSpPr>
-          <p:cNvPr id="1278581807" name="TextBox 2"/>
+          <p:cNvPr id="417475063" name="TextBox 2"/>
           <p:cNvSpPr txBox="1"/>
           <p:nvPr/>
         </p:nvSpPr>
@@ -10659,7 +10669,7 @@
       </p:sp>
       <p:sp>
         <p:nvSpPr>
-          <p:cNvPr id="1584862905" name="TextBox 3"/>
+          <p:cNvPr id="1344612411" name="TextBox 3"/>
           <p:cNvSpPr txBox="1"/>
           <p:nvPr/>
         </p:nvSpPr>
@@ -10697,7 +10707,7 @@
       </p:sp>
       <p:sp>
         <p:nvSpPr>
-          <p:cNvPr id="881016325" name="Rectangle 4"/>
+          <p:cNvPr id="742017877" name="Rectangle 4"/>
           <p:cNvSpPr/>
           <p:nvPr/>
         </p:nvSpPr>
@@ -10744,7 +10754,7 @@
       </p:sp>
       <p:sp>
         <p:nvSpPr>
-          <p:cNvPr id="415763549" name="TextBox 5"/>
+          <p:cNvPr id="928515928" name="TextBox 5"/>
           <p:cNvSpPr txBox="1"/>
           <p:nvPr/>
         </p:nvSpPr>
@@ -10782,7 +10792,7 @@
       </p:sp>
       <p:sp>
         <p:nvSpPr>
-          <p:cNvPr id="2147264726" name="TextBox 6"/>
+          <p:cNvPr id="18822382" name="TextBox 6"/>
           <p:cNvSpPr txBox="1"/>
           <p:nvPr/>
         </p:nvSpPr>
@@ -10889,7 +10899,7 @@
       </p:sp>
       <p:sp>
         <p:nvSpPr>
-          <p:cNvPr id="1960003529" name="TextBox 7"/>
+          <p:cNvPr id="810793533" name="TextBox 7"/>
           <p:cNvSpPr txBox="1"/>
           <p:nvPr/>
         </p:nvSpPr>
@@ -10927,7 +10937,7 @@
       </p:sp>
       <p:sp>
         <p:nvSpPr>
-          <p:cNvPr id="1955531499" name="TextBox 8"/>
+          <p:cNvPr id="1860467446" name="TextBox 8"/>
           <p:cNvSpPr txBox="1"/>
           <p:nvPr/>
         </p:nvSpPr>
@@ -11034,14 +11044,14 @@
       </p:sp>
       <p:sp>
         <p:nvSpPr>
-          <p:cNvPr id="1309668723" name="TextBox 9"/>
+          <p:cNvPr id="1734380613" name="TextBox 9"/>
           <p:cNvSpPr txBox="1"/>
           <p:nvPr/>
         </p:nvSpPr>
         <p:spPr bwMode="auto">
           <a:xfrm>
             <a:off x="457200" y="6446520"/>
-            <a:ext cx="7315200" cy="320040"/>
+            <a:ext cx="7315919" cy="411839"/>
           </a:xfrm>
           <a:prstGeom prst="rect">
             <a:avLst/>
@@ -11058,21 +11068,29 @@
               <a:defRPr/>
             </a:pPr>
             <a:r>
-              <a:rPr sz="900" b="0" i="0">
+              <a:rPr lang="en-US" sz="900" b="0" i="0" u="none" strike="noStrike" cap="none" spc="0">
                 <a:solidFill>
                   <a:srgbClr val="555555"/>
                 </a:solidFill>
                 <a:latin typeface="Segoe UI"/>
-              </a:rPr>
-              <a:t>Project 7 — SOC Security Operations Copilot  —  Soliman</a:t>
-            </a:r>
-            <a:endParaRPr/>
-          </a:p>
-        </p:txBody>
-      </p:sp>
-      <p:sp>
-        <p:nvSpPr>
-          <p:cNvPr id="978257332" name="TextBox 10"/>
+                <a:ea typeface="Segoe UI"/>
+                <a:cs typeface="Segoe UI"/>
+              </a:rPr>
+              <a:t>Project 7 — SOC Security Operations Copilot  —  Mohamed Soliman</a:t>
+            </a:r>
+            <a:endParaRPr sz="900"/>
+          </a:p>
+          <a:p>
+            <a:pPr>
+              <a:defRPr/>
+            </a:pPr>
+            <a:endParaRPr/>
+          </a:p>
+        </p:txBody>
+      </p:sp>
+      <p:sp>
+        <p:nvSpPr>
+          <p:cNvPr id="1356868376" name="TextBox 10"/>
           <p:cNvSpPr txBox="1"/>
           <p:nvPr/>
         </p:nvSpPr>
